--- a/assets/powerpoints/module-n2-couloirs/A1-ou-est-le-local-214.pptx
+++ b/assets/powerpoints/module-n2-couloirs/A1-ou-est-le-local-214.pptx
@@ -12102,7 +12102,43 @@
                 </a:solidFill>
                 <a:latin typeface="Verdana"/>
               </a:rPr>
-              <a:t>On commence par « &lt;b&gt;excusez-moi&lt;/b&gt; », puis on pose la question, puis on &lt;b&gt;remercie&lt;/b&gt;. Trois temps, toujours les mêmes. Personne ne se fâche jamais d'avoir été dérangé pour ça.</a:t>
+              <a:t>On commence par « </a:t>
+            </a:r>
+            <a:r>
+              <a:rPr sz="2000" b="1" i="0">
+                <a:solidFill>
+                  <a:srgbClr val="4B4F52"/>
+                </a:solidFill>
+                <a:latin typeface="Verdana"/>
+              </a:rPr>
+              <a:t>excusez-moi</a:t>
+            </a:r>
+            <a:r>
+              <a:rPr sz="2000" b="0" i="0">
+                <a:solidFill>
+                  <a:srgbClr val="4B4F52"/>
+                </a:solidFill>
+                <a:latin typeface="Verdana"/>
+              </a:rPr>
+              <a:t> », puis on pose la question, puis on </a:t>
+            </a:r>
+            <a:r>
+              <a:rPr sz="2000" b="1" i="0">
+                <a:solidFill>
+                  <a:srgbClr val="4B4F52"/>
+                </a:solidFill>
+                <a:latin typeface="Verdana"/>
+              </a:rPr>
+              <a:t>remercie</a:t>
+            </a:r>
+            <a:r>
+              <a:rPr sz="2000" b="0" i="0">
+                <a:solidFill>
+                  <a:srgbClr val="4B4F52"/>
+                </a:solidFill>
+                <a:latin typeface="Verdana"/>
+              </a:rPr>
+              <a:t>. Trois temps, toujours les mêmes. Personne ne se fâche jamais d'avoir été dérangé pour ça.</a:t>
             </a:r>
           </a:p>
         </p:txBody>
